--- a/docs/training/Otta training 1 - The website.pptx
+++ b/docs/training/Otta training 1 - The website.pptx
@@ -124,25 +124,25 @@
   <p:extLst>
     <p:ext uri="{521415D9-36F7-43E2-AB2F-B90AF26B5E84}">
       <p14:sectionLst xmlns:p14="http://schemas.microsoft.com/office/powerpoint/2010/main">
-        <p14:section name="Introduction" id="{74a35cb8-31dc-a388-1f99-63fe457156b9}">
+        <p14:section name="Introduction" id="{f035916a-c927-669b-a129-52ba7bbc4c35}">
           <p14:sldIdLst>
             <p14:sldId id="257"/>
           </p14:sldIdLst>
         </p14:section>
-        <p14:section name="Getting in" id="{030aee75-b6a8-6878-2030-940ba936262a}">
+        <p14:section name="Getting in" id="{353e4e2f-7de7-08d2-4df3-e8aaa55ddcdb}">
           <p14:sldIdLst>
             <p14:sldId id="258"/>
             <p14:sldId id="259"/>
           </p14:sldIdLst>
         </p14:section>
-        <p14:section name="Finding your way" id="{80294bdc-bd05-ba94-ab9f-9d145075bf82}">
+        <p14:section name="Finding your way" id="{d18c7c14-7ba8-86c2-4d32-576cdb410a2b}">
           <p14:sldIdLst>
             <p14:sldId id="260"/>
             <p14:sldId id="261"/>
             <p14:sldId id="262"/>
           </p14:sldIdLst>
         </p14:section>
-        <p14:section name="Product pages" id="{56eef23d-552a-b579-22f0-41a13c40f3e5}">
+        <p14:section name="Product pages" id="{cb29163c-b4f6-c9df-2a67-80365628642c}">
           <p14:sldIdLst>
             <p14:sldId id="263"/>
             <p14:sldId id="264"/>
@@ -150,7 +150,7 @@
             <p14:sldId id="266"/>
           </p14:sldIdLst>
         </p14:section>
-        <p14:section name="Resources, claims and contact" id="{d7470664-24be-bb0e-5470-6e3dfbb49608}">
+        <p14:section name="Resources, claims and contact" id="{1bfe447e-6064-8af0-ed2f-4d98152bedff}">
           <p14:sldIdLst>
             <p14:sldId id="267"/>
             <p14:sldId id="268"/>
@@ -160,7 +160,7 @@
             <p14:sldId id="272"/>
           </p14:sldIdLst>
         </p14:section>
-        <p14:section name="Summary" id="{2ba7b860-6b19-e1f7-6443-ca84064ed2d8}">
+        <p14:section name="Summary" id="{a455cbfa-4aff-1664-fc4c-3dd8ae8d9e08}">
           <p14:sldIdLst>
             <p14:sldId id="273"/>
           </p14:sldIdLst>
@@ -745,7 +745,7 @@
           <a:p>
             <a:r>
               <a:rPr lang="en-US" dirty="0"/>
-              <a:t>Otta works through brokers, so Apply now always starts by confirming the visitor is a broker. Brokers can then go to the broker portal, where they can complete the application online or send a secure link to their client. If they prefer paper, they can download the PDF proposal form. Members of the public are directed to talk to their broker.</a:t>
+              <a:t>Otta works through brokers, so Apply now always starts by confirming the visitor is a broker. Brokers can then go to the broker portal, where they can complete the application online or create a secure link that they send to their client themselves. Otta never contacts clients directly. If they prefer paper, they can download the PDF proposal form. Members of the public are directed to talk to their broker.</a:t>
             </a:r>
             <a:endParaRPr lang="en-US" dirty="0"/>
           </a:p>
@@ -3842,7 +3842,7 @@
                   <a:schemeClr val="tx1"/>
                 </a:solidFill>
               </a:rPr>
-              <a:t>Go to the broker portal to complete the form online or send it to a client.</a:t>
+              <a:t>Go to the broker portal to complete the form online, or create a secure link to send to their client themselves.</a:t>
             </a:r>
             <a:endParaRPr lang="en-US" sz="1350" dirty="0"/>
           </a:p>
@@ -6448,7 +6448,7 @@
         </p:nvSpPr>
         <p:spPr>
           <a:xfrm>
-            <a:off x="731520" y="1664208"/>
+            <a:off x="731520" y="1668780"/>
             <a:ext cx="457200" cy="457200"/>
           </a:xfrm>
           <a:prstGeom prst="ellipse">
@@ -6473,7 +6473,7 @@
         </p:nvSpPr>
         <p:spPr>
           <a:xfrm>
-            <a:off x="731520" y="1664208"/>
+            <a:off x="731520" y="1668780"/>
             <a:ext cx="457200" cy="457200"/>
           </a:xfrm>
           <a:prstGeom prst="rect">
@@ -6572,7 +6572,7 @@
         </p:nvSpPr>
         <p:spPr>
           <a:xfrm>
-            <a:off x="731520" y="2807208"/>
+            <a:off x="731520" y="2811780"/>
             <a:ext cx="457200" cy="457200"/>
           </a:xfrm>
           <a:prstGeom prst="ellipse">
@@ -6597,7 +6597,7 @@
         </p:nvSpPr>
         <p:spPr>
           <a:xfrm>
-            <a:off x="731520" y="2807208"/>
+            <a:off x="731520" y="2811780"/>
             <a:ext cx="457200" cy="457200"/>
           </a:xfrm>
           <a:prstGeom prst="rect">
@@ -6696,7 +6696,7 @@
         </p:nvSpPr>
         <p:spPr>
           <a:xfrm>
-            <a:off x="731520" y="3950208"/>
+            <a:off x="731520" y="3954780"/>
             <a:ext cx="457200" cy="457200"/>
           </a:xfrm>
           <a:prstGeom prst="ellipse">
@@ -6721,7 +6721,7 @@
         </p:nvSpPr>
         <p:spPr>
           <a:xfrm>
-            <a:off x="731520" y="3950208"/>
+            <a:off x="731520" y="3954780"/>
             <a:ext cx="457200" cy="457200"/>
           </a:xfrm>
           <a:prstGeom prst="rect">
@@ -6820,7 +6820,7 @@
         </p:nvSpPr>
         <p:spPr>
           <a:xfrm>
-            <a:off x="731520" y="5093208"/>
+            <a:off x="731520" y="5097780"/>
             <a:ext cx="457200" cy="457200"/>
           </a:xfrm>
           <a:prstGeom prst="ellipse">
@@ -6845,7 +6845,7 @@
         </p:nvSpPr>
         <p:spPr>
           <a:xfrm>
-            <a:off x="731520" y="5093208"/>
+            <a:off x="731520" y="5097780"/>
             <a:ext cx="457200" cy="457200"/>
           </a:xfrm>
           <a:prstGeom prst="rect">
